--- a/curso/semana-05-rsu-y-backlog/nuestras-entregas/Tablero_Kanban_NewBit/Tablero_Kanban_NewBit.pptx
+++ b/curso/semana-05-rsu-y-backlog/nuestras-entregas/Tablero_Kanban_NewBit/Tablero_Kanban_NewBit.pptx
@@ -4221,7 +4221,7 @@
                           <a:ea typeface="Calibri" pitchFamily="34" charset="-122"/>
                           <a:cs typeface="Calibri" pitchFamily="34" charset="-120"/>
                         </a:rPr>
-                        <a:t>Detectar trabajadores</a:t>
+                        <a:t>Detectar operarios</a:t>
                       </a:r>
                       <a:endParaRPr lang="en-US" sz="1100" dirty="0">
                         <a:latin typeface="Calibri" charset="0"/>
@@ -4289,7 +4289,7 @@
                           <a:ea typeface="Calibri" pitchFamily="34" charset="-122"/>
                           <a:cs typeface="Calibri" pitchFamily="34" charset="-120"/>
                         </a:rPr>
-                        <a:t>EP02 · Filtrado YOLOv4</a:t>
+                        <a:t>EP02 · Detección YOLOv8</a:t>
                       </a:r>
                       <a:endParaRPr lang="en-US" sz="1100" dirty="0">
                         <a:latin typeface="Calibri" charset="0"/>
@@ -4767,7 +4767,7 @@
                           <a:ea typeface="Calibri" pitchFamily="34" charset="-122"/>
                           <a:cs typeface="Calibri" pitchFamily="34" charset="-120"/>
                         </a:rPr>
-                        <a:t>EP02 · Filtrado YOLOv4</a:t>
+                        <a:t>EP02 · Detección YOLOv8</a:t>
                       </a:r>
                       <a:endParaRPr lang="en-US" sz="1100" dirty="0">
                         <a:latin typeface="Calibri" charset="0"/>
@@ -5245,7 +5245,7 @@
                           <a:ea typeface="Calibri" pitchFamily="34" charset="-122"/>
                           <a:cs typeface="Calibri" pitchFamily="34" charset="-120"/>
                         </a:rPr>
-                        <a:t>EP03 · Segmentación temporal</a:t>
+                        <a:t>EP03 · Reducción y clips</a:t>
                       </a:r>
                       <a:endParaRPr lang="en-US" sz="1100" dirty="0">
                         <a:latin typeface="Calibri" charset="0"/>
@@ -6133,7 +6133,7 @@
                           <a:ea typeface="Calibri" pitchFamily="34" charset="-122"/>
                           <a:cs typeface="Calibri" pitchFamily="34" charset="-120"/>
                         </a:rPr>
-                        <a:t>Etiquetar el clip</a:t>
+                        <a:t>Clasificar y tipificar</a:t>
                       </a:r>
                       <a:endParaRPr lang="en-US" sz="1100" dirty="0">
                         <a:latin typeface="Calibri" charset="0"/>
@@ -6679,7 +6679,7 @@
                           <a:ea typeface="Calibri" pitchFamily="34" charset="-122"/>
                           <a:cs typeface="Calibri" pitchFamily="34" charset="-120"/>
                         </a:rPr>
-                        <a:t>EP05 · GUI y validación</a:t>
+                        <a:t>EP05 · Monitoreo y alertas</a:t>
                       </a:r>
                       <a:endParaRPr lang="en-US" sz="1100" dirty="0">
                         <a:latin typeface="Calibri" charset="0"/>
@@ -7089,7 +7089,7 @@
                           <a:ea typeface="Calibri" pitchFamily="34" charset="-122"/>
                           <a:cs typeface="Calibri" pitchFamily="34" charset="-120"/>
                         </a:rPr>
-                        <a:t>Alerta insegura</a:t>
+                        <a:t>Alerta de riesgo</a:t>
                       </a:r>
                       <a:endParaRPr lang="en-US" sz="1100" dirty="0">
                         <a:latin typeface="Calibri" charset="0"/>
@@ -7157,7 +7157,7 @@
                           <a:ea typeface="Calibri" pitchFamily="34" charset="-122"/>
                           <a:cs typeface="Calibri" pitchFamily="34" charset="-120"/>
                         </a:rPr>
-                        <a:t>EP05 · GUI y validación</a:t>
+                        <a:t>EP05 · Monitoreo y alertas</a:t>
                       </a:r>
                       <a:endParaRPr lang="en-US" sz="1100" dirty="0">
                         <a:latin typeface="Calibri" charset="0"/>
@@ -7635,7 +7635,7 @@
                           <a:ea typeface="Calibri" pitchFamily="34" charset="-122"/>
                           <a:cs typeface="Calibri" pitchFamily="34" charset="-120"/>
                         </a:rPr>
-                        <a:t>EP06 · Administración</a:t>
+                        <a:t>EP06 · Calibración y métricas</a:t>
                       </a:r>
                       <a:endParaRPr lang="en-US" sz="1100" dirty="0">
                         <a:latin typeface="Calibri" charset="0"/>
@@ -8113,7 +8113,7 @@
                           <a:ea typeface="Calibri" pitchFamily="34" charset="-122"/>
                           <a:cs typeface="Calibri" pitchFamily="34" charset="-120"/>
                         </a:rPr>
-                        <a:t>EP03 · Segmentación temporal</a:t>
+                        <a:t>EP03 · Reducción y clips</a:t>
                       </a:r>
                       <a:endParaRPr lang="en-US" sz="1100" dirty="0">
                         <a:latin typeface="Calibri" charset="0"/>
@@ -8591,7 +8591,7 @@
                           <a:ea typeface="Calibri" pitchFamily="34" charset="-122"/>
                           <a:cs typeface="Calibri" pitchFamily="34" charset="-120"/>
                         </a:rPr>
-                        <a:t>EP06 · Administración</a:t>
+                        <a:t>EP06 · Calibración y métricas</a:t>
                       </a:r>
                       <a:endParaRPr lang="en-US" sz="1100" dirty="0">
                         <a:latin typeface="Calibri" charset="0"/>
@@ -9295,7 +9295,7 @@
                 <a:ea typeface="Calibri" pitchFamily="34" charset="-122"/>
                 <a:cs typeface="Calibri" pitchFamily="34" charset="-120"/>
               </a:rPr>
-              <a:t>Como investigador, quiero cargar un video industrial, para iniciar el análisis.</a:t>
+              <a:t>Como administrador (Jorge), quiero cargar un video (.mp4/.avi), para iniciar el procesamiento.</a:t>
             </a:r>
             <a:endParaRPr lang="en-US" sz="1000" dirty="0"/>
           </a:p>
@@ -9714,7 +9714,7 @@
                 <a:ea typeface="Calibri" pitchFamily="34" charset="-122"/>
                 <a:cs typeface="Calibri" pitchFamily="34" charset="-120"/>
               </a:rPr>
-              <a:t>Como investigador, quiero fragmentar el video en frames, para la inferencia espacial.</a:t>
+              <a:t>Como administrador (Jorge), quiero fragmentar el video en frames, para la inferencia espacial.</a:t>
             </a:r>
             <a:endParaRPr lang="en-US" sz="1000" dirty="0"/>
           </a:p>
@@ -9836,7 +9836,7 @@
                 <a:ea typeface="Calibri" pitchFamily="34" charset="-122"/>
                 <a:cs typeface="Calibri" pitchFamily="34" charset="-120"/>
               </a:rPr>
-              <a:t>Los redimensiona al tamaño de entrada de YOLOv4.</a:t>
+              <a:t>Los normaliza al tamaño de entrada del detector espacial.</a:t>
             </a:r>
             <a:endParaRPr lang="en-US" sz="1000" dirty="0"/>
           </a:p>
@@ -10094,7 +10094,7 @@
                 <a:ea typeface="Calibri" pitchFamily="34" charset="-122"/>
                 <a:cs typeface="Calibri" pitchFamily="34" charset="-120"/>
               </a:rPr>
-              <a:t>Detectar trabajadores</a:t>
+              <a:t>Detectar operarios</a:t>
             </a:r>
             <a:endParaRPr lang="en-US" sz="1200" dirty="0"/>
           </a:p>
@@ -10133,7 +10133,7 @@
                 <a:ea typeface="Calibri" pitchFamily="34" charset="-122"/>
                 <a:cs typeface="Calibri" pitchFamily="34" charset="-120"/>
               </a:rPr>
-              <a:t>Como investigador, quiero que YOLOv4 detecte trabajadores, para ubicar la acción.</a:t>
+              <a:t>Como supervisora SST (Mariana), quiero que YOLOv8 detecte operarios, para ubicar la actividad.</a:t>
             </a:r>
             <a:endParaRPr lang="en-US" sz="1000" dirty="0"/>
           </a:p>
@@ -10552,7 +10552,7 @@
                 <a:ea typeface="Calibri" pitchFamily="34" charset="-122"/>
                 <a:cs typeface="Calibri" pitchFamily="34" charset="-120"/>
               </a:rPr>
-              <a:t>Como investigador, quiero descartar frames sin trabajadores, para no saturar el modelo.</a:t>
+              <a:t>Como administrador (Jorge), quiero descartar frames sin trabajadores, para optimizar el cómputo.</a:t>
             </a:r>
             <a:endParaRPr lang="en-US" sz="1000" dirty="0"/>
           </a:p>
@@ -10971,7 +10971,7 @@
                 <a:ea typeface="Calibri" pitchFamily="34" charset="-122"/>
                 <a:cs typeface="Calibri" pitchFamily="34" charset="-120"/>
               </a:rPr>
-              <a:t>Como investigador, quiero agrupar los frames en clips fijos, para la red temporal.</a:t>
+              <a:t>Como supervisora SST (Mariana), quiero agrupar los frames en clips fijos, para la red temporal.</a:t>
             </a:r>
             <a:endParaRPr lang="en-US" sz="1000" dirty="0"/>
           </a:p>
@@ -11390,7 +11390,7 @@
                 <a:ea typeface="Calibri" pitchFamily="34" charset="-122"/>
                 <a:cs typeface="Calibri" pitchFamily="34" charset="-120"/>
               </a:rPr>
-              <a:t>Como investigador, quiero descartar clips sin tiempo mínimo, para evitar falsos.</a:t>
+              <a:t>Como supervisora SST (Mariana), quiero descartar clips sin tiempo mínimo, para evitar falsos positivos.</a:t>
             </a:r>
             <a:endParaRPr lang="en-US" sz="1000" dirty="0"/>
           </a:p>
@@ -11962,7 +11962,7 @@
                 <a:ea typeface="Calibri" pitchFamily="34" charset="-122"/>
                 <a:cs typeface="Calibri" pitchFamily="34" charset="-120"/>
               </a:rPr>
-              <a:t>Como investigador, quiero procesar el clip con ConvLSTM, para extraer el movimiento.</a:t>
+              <a:t>Como supervisora SST (Mariana), quiero procesar el clip con ConvLSTM, para extraer dependencias temporales.</a:t>
             </a:r>
             <a:endParaRPr lang="en-US" sz="1000" dirty="0"/>
           </a:p>
@@ -12342,7 +12342,7 @@
                 <a:ea typeface="Calibri" pitchFamily="34" charset="-122"/>
                 <a:cs typeface="Calibri" pitchFamily="34" charset="-120"/>
               </a:rPr>
-              <a:t>Etiquetar el clip</a:t>
+              <a:t>Clasificar y tipificar</a:t>
             </a:r>
             <a:endParaRPr lang="en-US" sz="1200" dirty="0"/>
           </a:p>
@@ -12381,7 +12381,7 @@
                 <a:ea typeface="Calibri" pitchFamily="34" charset="-122"/>
                 <a:cs typeface="Calibri" pitchFamily="34" charset="-120"/>
               </a:rPr>
-              <a:t>Como investigador, quiero la etiqueta seguro/inseguro, para obtener el resultado.</a:t>
+              <a:t>Como supervisora SST (Mariana), quiero clasificar y tipificar la conducta (vía/panel), para diagnosticar el acto.</a:t>
             </a:r>
             <a:endParaRPr lang="en-US" sz="1000" dirty="0"/>
           </a:p>
@@ -12442,7 +12442,7 @@
                 <a:ea typeface="Calibri" pitchFamily="34" charset="-122"/>
                 <a:cs typeface="Calibri" pitchFamily="34" charset="-120"/>
               </a:rPr>
-              <a:t>Cada clip queda etiquetado con su probabilidad.</a:t>
+              <a:t>Cada clip queda etiquetado con su riesgo y tipo de conducta.</a:t>
             </a:r>
             <a:endParaRPr lang="en-US" sz="1000" dirty="0"/>
           </a:p>
@@ -12800,7 +12800,7 @@
                 <a:ea typeface="Calibri" pitchFamily="34" charset="-122"/>
                 <a:cs typeface="Calibri" pitchFamily="34" charset="-120"/>
               </a:rPr>
-              <a:t>Como evaluador, quiero ver el video con un recuadro de color, para validar la inferencia.</a:t>
+              <a:t>Como operadora (Lucía), quiero ver el video con recuadros de riesgo, para validar la inferencia.</a:t>
             </a:r>
             <a:endParaRPr lang="en-US" sz="1000" dirty="0"/>
           </a:p>
@@ -13180,7 +13180,7 @@
                 <a:ea typeface="Calibri" pitchFamily="34" charset="-122"/>
                 <a:cs typeface="Calibri" pitchFamily="34" charset="-120"/>
               </a:rPr>
-              <a:t>Alerta insegura</a:t>
+              <a:t>Alerta de riesgo</a:t>
             </a:r>
             <a:endParaRPr lang="en-US" sz="1200" dirty="0"/>
           </a:p>
@@ -13219,7 +13219,7 @@
                 <a:ea typeface="Calibri" pitchFamily="34" charset="-122"/>
                 <a:cs typeface="Calibri" pitchFamily="34" charset="-120"/>
               </a:rPr>
-              <a:t>Como evaluador, quiero una alerta ante un riesgo, para probar la respuesta.</a:t>
+              <a:t>Como operadora (Lucía), quiero alertas inmediatas ante conductas inseguras, para intervenir a tiempo.</a:t>
             </a:r>
             <a:endParaRPr lang="en-US" sz="1000" dirty="0"/>
           </a:p>
@@ -13638,7 +13638,7 @@
                 <a:ea typeface="Calibri" pitchFamily="34" charset="-122"/>
                 <a:cs typeface="Calibri" pitchFamily="34" charset="-120"/>
               </a:rPr>
-              <a:t>Como administrador, quiero cambiar el umbral de YOLOv4, para calibrar el filtrado.</a:t>
+              <a:t>Como administrador (Jorge), quiero ajustar el umbral de YOLOv8, para calibrar la sensibilidad.</a:t>
             </a:r>
             <a:endParaRPr lang="en-US" sz="1000" dirty="0"/>
           </a:p>
@@ -14057,7 +14057,7 @@
                 <a:ea typeface="Calibri" pitchFamily="34" charset="-122"/>
                 <a:cs typeface="Calibri" pitchFamily="34" charset="-120"/>
               </a:rPr>
-              <a:t>Como administrador, quiero ver el log de tiempos, para saber si el filtrado acelera.</a:t>
+              <a:t>Como gerente (Ricardo) y TI (Jorge), quiero ver el log de tiempos y aceleración, para evaluar la eficiencia.</a:t>
             </a:r>
             <a:endParaRPr lang="en-US" sz="1000" dirty="0"/>
           </a:p>
@@ -15634,7 +15634,7 @@
                 <a:ea typeface="Calibri" pitchFamily="34" charset="-122"/>
                 <a:cs typeface="Calibri" pitchFamily="34" charset="-120"/>
               </a:rPr>
-              <a:t>Redimensionar frames</a:t>
+              <a:t>Normalizar frames</a:t>
             </a:r>
             <a:endParaRPr lang="en-US" sz="1000" dirty="0"/>
           </a:p>
@@ -15831,7 +15831,7 @@
                 <a:ea typeface="Calibri" pitchFamily="34" charset="-122"/>
                 <a:cs typeface="Calibri" pitchFamily="34" charset="-120"/>
               </a:rPr>
-              <a:t>Detectar trabajadores</a:t>
+              <a:t>Detectar operarios</a:t>
             </a:r>
             <a:endParaRPr lang="en-US" sz="1200" dirty="0"/>
           </a:p>
@@ -16102,7 +16102,7 @@
                 <a:ea typeface="Calibri" pitchFamily="34" charset="-122"/>
                 <a:cs typeface="Calibri" pitchFamily="34" charset="-120"/>
               </a:rPr>
-              <a:t>Instalar YOLOv4</a:t>
+              <a:t>Integrar YOLOv8</a:t>
             </a:r>
             <a:endParaRPr lang="en-US" sz="1000" dirty="0"/>
           </a:p>
@@ -16163,7 +16163,7 @@
                 <a:ea typeface="Calibri" pitchFamily="34" charset="-122"/>
                 <a:cs typeface="Calibri" pitchFamily="34" charset="-120"/>
               </a:rPr>
-              <a:t>Detectar personas</a:t>
+              <a:t>Detectar operarios</a:t>
             </a:r>
             <a:endParaRPr lang="en-US" sz="1000" dirty="0"/>
           </a:p>
